--- a/ai-engineering/06-eval/slides/eval-engineering.pptx
+++ b/ai-engineering/06-eval/slides/eval-engineering.pptx
@@ -1677,7 +1677,7 @@
           <a:lstStyle/>
           <a:p>
             <a:r>
-              <a:t>Chatbot Arena ranks models this way from millions of blind votes, but the ranking reflects what users happened to ask. Lab: practice/02-elo-leaderboard.</a:t>
+              <a:t>Chatbot Arena ranks models this way from millions of blind votes, but the ranking reflects what users happened to ask. Worked Elo vs. Bradley–Terry example in note 05; full lab upstream in ai-agent-book chapter7/elo-leaderboard.</a:t>
             </a:r>
           </a:p>
           <a:p/>
@@ -14585,7 +14585,7 @@
       </p:sp>
       <p:pic>
         <p:nvPicPr>
-          <p:cNvPr id="14" name="Picture 13" descr="li-ai-agents-in-depth-fig7-4-5455704924839797362.png"/>
+          <p:cNvPr id="14" name="Picture 13" descr="li-ai-agents-in-depth-fig7-4-404904761524884011.png"/>
           <p:cNvPicPr>
             <a:picLocks noChangeAspect="1"/>
           </p:cNvPicPr>
@@ -24018,7 +24018,7 @@
       </p:sp>
       <p:pic>
         <p:nvPicPr>
-          <p:cNvPr id="14" name="Picture 13" descr="li-ai-agents-in-depth-fig7-6-5297412210537637326-3108754414885997842.jpg"/>
+          <p:cNvPr id="14" name="Picture 13" descr="li-ai-agents-in-depth-fig7-6-3086927992971478313-7016280338278890230.jpg"/>
           <p:cNvPicPr>
             <a:picLocks noChangeAspect="1"/>
           </p:cNvPicPr>
@@ -27519,7 +27519,7 @@
       </p:sp>
       <p:pic>
         <p:nvPicPr>
-          <p:cNvPr id="14" name="Picture 13" descr="deeplearning-ai-evaluating-ai-agents-lab3-router-skill-eval-5858115998599007672.jpg"/>
+          <p:cNvPr id="14" name="Picture 13" descr="deeplearning-ai-evaluating-ai-agents-lab3-router-skill-eval-4542069284600904162.jpg"/>
           <p:cNvPicPr>
             <a:picLocks noChangeAspect="1"/>
           </p:cNvPicPr>
@@ -31235,7 +31235,7 @@
       </p:sp>
       <p:pic>
         <p:nvPicPr>
-          <p:cNvPr id="14" name="Picture 13" descr="deeplearning-ai-evaluating-ai-agents-lab4-convergence-experiment-828023783504853693.jpg"/>
+          <p:cNvPr id="14" name="Picture 13" descr="deeplearning-ai-evaluating-ai-agents-lab4-convergence-experiment-3347250216775804537.jpg"/>
           <p:cNvPicPr>
             <a:picLocks noChangeAspect="1"/>
           </p:cNvPicPr>
@@ -43148,7 +43148,7 @@
       </p:sp>
       <p:pic>
         <p:nvPicPr>
-          <p:cNvPr id="14" name="Picture 13" descr="deeplearning-ai-evaluating-ai-agents-lab5-experiments-3223776750780928689.jpg"/>
+          <p:cNvPr id="14" name="Picture 13" descr="deeplearning-ai-evaluating-ai-agents-lab5-experiments-4386026617103415200.jpg"/>
           <p:cNvPicPr>
             <a:picLocks noChangeAspect="1"/>
           </p:cNvPicPr>
@@ -52880,7 +52880,7 @@
       </p:sp>
       <p:pic>
         <p:nvPicPr>
-          <p:cNvPr id="14" name="Picture 13" descr="course-two-layer-eval-human-llm-calibration-8983851198773012239.jpg"/>
+          <p:cNvPr id="14" name="Picture 13" descr="course-two-layer-eval-human-llm-calibration-6713432795129806056.jpg"/>
           <p:cNvPicPr>
             <a:picLocks noChangeAspect="1"/>
           </p:cNvPicPr>
@@ -59632,8 +59632,8 @@
         </p:nvSpPr>
         <p:spPr>
           <a:xfrm>
-            <a:off x="502920" y="1563878"/>
-            <a:ext cx="101346" cy="101346"/>
+            <a:off x="502920" y="1568704"/>
+            <a:ext cx="106680" cy="106680"/>
           </a:xfrm>
           <a:prstGeom prst="rect">
             <a:avLst/>
@@ -59677,7 +59677,7 @@
         <p:spPr>
           <a:xfrm>
             <a:off x="822960" y="1472184"/>
-            <a:ext cx="5944038" cy="728472"/>
+            <a:ext cx="5944038" cy="762000"/>
           </a:xfrm>
           <a:prstGeom prst="rect">
             <a:avLst/>
@@ -59696,114 +59696,36 @@
               </a:lnSpc>
             </a:pPr>
             <a:r>
-              <a:rPr sz="1900" i="0" b="1">
+              <a:rPr sz="2000" i="0" b="1">
                 <a:solidFill>
                   <a:srgbClr val="1E293B"/>
                 </a:solidFill>
                 <a:latin typeface="Helvetica Neue"/>
               </a:rPr>
-              <a:t>Practice:</a:t>
-            </a:r>
-            <a:r>
-              <a:rPr sz="1900" i="0" b="0">
+              <a:t>Elo vs. Bradley–Terry:</a:t>
+            </a:r>
+            <a:r>
+              <a:rPr sz="2000" i="0" b="0">
                 <a:solidFill>
                   <a:srgbClr val="1E293B"/>
                 </a:solidFill>
                 <a:latin typeface="Helvetica Neue"/>
               </a:rPr>
-              <a:t> practice/exercises.md, eight labs on one system</a:t>
-            </a:r>
-          </a:p>
-        </p:txBody>
-      </p:sp>
-      <p:sp>
-        <p:nvSpPr>
-          <p:cNvPr id="12" name="TextBox 11"/>
-          <p:cNvSpPr txBox="1"/>
-          <p:nvPr/>
-        </p:nvSpPr>
-        <p:spPr>
-          <a:xfrm>
-            <a:off x="1005840" y="2167128"/>
-            <a:ext cx="182880" cy="536448"/>
-          </a:xfrm>
-          <a:prstGeom prst="rect">
-            <a:avLst/>
-          </a:prstGeom>
-          <a:noFill/>
-        </p:spPr>
-        <p:txBody>
-          <a:bodyPr wrap="square" lIns="0" rIns="0" tIns="0" bIns="0" anchor="t">
-            <a:noAutofit/>
-          </a:bodyPr>
-          <a:lstStyle/>
-          <a:p>
-            <a:pPr algn="l">
-              <a:lnSpc>
-                <a:spcPct val="110000"/>
-              </a:lnSpc>
-            </a:pPr>
-            <a:r>
-              <a:rPr sz="1600" i="0" b="0">
-                <a:solidFill>
-                  <a:srgbClr val="94A3B8"/>
-                </a:solidFill>
-                <a:latin typeface="Helvetica Neue"/>
-              </a:rPr>
-              <a:t>–</a:t>
-            </a:r>
-          </a:p>
-        </p:txBody>
-      </p:sp>
-      <p:sp>
-        <p:nvSpPr>
-          <p:cNvPr id="13" name="TextBox 12"/>
-          <p:cNvSpPr txBox="1"/>
-          <p:nvPr/>
-        </p:nvSpPr>
-        <p:spPr>
-          <a:xfrm>
-            <a:off x="1188720" y="2167128"/>
-            <a:ext cx="5578278" cy="627888"/>
-          </a:xfrm>
-          <a:prstGeom prst="rect">
-            <a:avLst/>
-          </a:prstGeom>
-          <a:noFill/>
-        </p:spPr>
-        <p:txBody>
-          <a:bodyPr wrap="square" lIns="0" rIns="0" tIns="0" bIns="0" anchor="t">
-            <a:noAutofit/>
-          </a:bodyPr>
-          <a:lstStyle/>
-          <a:p>
-            <a:pPr algn="l">
-              <a:lnSpc>
-                <a:spcPct val="110000"/>
-              </a:lnSpc>
-            </a:pPr>
-            <a:r>
-              <a:rPr sz="1600" i="0" b="0">
-                <a:solidFill>
-                  <a:srgbClr val="475569"/>
-                </a:solidFill>
-                <a:latin typeface="Helvetica Neue"/>
-              </a:rPr>
-              <a:t>Elo leaderboard lab in practice/02-elo-leaderboard, runs offline</a:t>
-            </a:r>
-          </a:p>
-        </p:txBody>
-      </p:sp>
-      <p:sp>
-        <p:nvSpPr>
-          <p:cNvPr id="14" name="Rectangle 13"/>
+              <a:t> worked example in 05, full lab upstream (ai-agent-book ch. 7)</a:t>
+            </a:r>
+          </a:p>
+        </p:txBody>
+      </p:sp>
+      <p:sp>
+        <p:nvSpPr>
+          <p:cNvPr id="12" name="Rectangle 11"/>
           <p:cNvSpPr/>
           <p:nvPr/>
         </p:nvSpPr>
         <p:spPr>
           <a:xfrm>
-            <a:off x="502920" y="2940050"/>
-            <a:ext cx="101346" cy="101346"/>
+            <a:off x="502920" y="2391664"/>
+            <a:ext cx="106680" cy="106680"/>
           </a:xfrm>
           <a:prstGeom prst="rect">
             <a:avLst/>
@@ -59840,14 +59762,14 @@
       </p:sp>
       <p:sp>
         <p:nvSpPr>
-          <p:cNvPr id="15" name="TextBox 14"/>
+          <p:cNvPr id="13" name="TextBox 12"/>
           <p:cNvSpPr txBox="1"/>
           <p:nvPr/>
         </p:nvSpPr>
         <p:spPr>
           <a:xfrm>
-            <a:off x="822960" y="2848356"/>
-            <a:ext cx="5944038" cy="1046988"/>
+            <a:off x="822960" y="2295144"/>
+            <a:ext cx="5944038" cy="1097280"/>
           </a:xfrm>
           <a:prstGeom prst="rect">
             <a:avLst/>
@@ -59866,7 +59788,7 @@
               </a:lnSpc>
             </a:pPr>
             <a:r>
-              <a:rPr sz="1900" i="0" b="1">
+              <a:rPr sz="2000" i="0" b="1">
                 <a:solidFill>
                   <a:srgbClr val="1E293B"/>
                 </a:solidFill>
@@ -59875,7 +59797,7 @@
               <a:t>Copy-ready snippets:</a:t>
             </a:r>
             <a:r>
-              <a:rPr sz="1900" i="0" b="0">
+              <a:rPr sz="2000" i="0" b="0">
                 <a:solidFill>
                   <a:srgbClr val="1E293B"/>
                 </a:solidFill>
@@ -59888,14 +59810,14 @@
       </p:sp>
       <p:sp>
         <p:nvSpPr>
-          <p:cNvPr id="16" name="Rectangle 15"/>
+          <p:cNvPr id="14" name="Rectangle 13"/>
           <p:cNvSpPr/>
           <p:nvPr/>
         </p:nvSpPr>
         <p:spPr>
           <a:xfrm>
-            <a:off x="502920" y="4040377"/>
-            <a:ext cx="101346" cy="101346"/>
+            <a:off x="502920" y="3549904"/>
+            <a:ext cx="106680" cy="106680"/>
           </a:xfrm>
           <a:prstGeom prst="rect">
             <a:avLst/>
@@ -59932,14 +59854,14 @@
       </p:sp>
       <p:sp>
         <p:nvSpPr>
-          <p:cNvPr id="17" name="TextBox 16"/>
+          <p:cNvPr id="15" name="TextBox 14"/>
           <p:cNvSpPr txBox="1"/>
           <p:nvPr/>
         </p:nvSpPr>
         <p:spPr>
           <a:xfrm>
-            <a:off x="822960" y="3948684"/>
-            <a:ext cx="5944038" cy="728472"/>
+            <a:off x="822960" y="3453384"/>
+            <a:ext cx="5944038" cy="1097280"/>
           </a:xfrm>
           <a:prstGeom prst="rect">
             <a:avLst/>
@@ -59958,7 +59880,7 @@
               </a:lnSpc>
             </a:pPr>
             <a:r>
-              <a:rPr sz="1900" i="0" b="1">
+              <a:rPr sz="2000" i="0" b="1">
                 <a:solidFill>
                   <a:srgbClr val="1E293B"/>
                 </a:solidFill>
@@ -59967,7 +59889,7 @@
               <a:t>Worked example:</a:t>
             </a:r>
             <a:r>
-              <a:rPr sz="1900" i="0" b="0">
+              <a:rPr sz="2000" i="0" b="0">
                 <a:solidFill>
                   <a:srgbClr val="1E293B"/>
                 </a:solidFill>
@@ -59980,14 +59902,14 @@
       </p:sp>
       <p:sp>
         <p:nvSpPr>
-          <p:cNvPr id="18" name="Rectangle 17"/>
+          <p:cNvPr id="16" name="Rectangle 15"/>
           <p:cNvSpPr/>
           <p:nvPr/>
         </p:nvSpPr>
         <p:spPr>
           <a:xfrm>
-            <a:off x="502920" y="4822190"/>
-            <a:ext cx="101346" cy="101346"/>
+            <a:off x="502920" y="4708144"/>
+            <a:ext cx="106680" cy="106680"/>
           </a:xfrm>
           <a:prstGeom prst="rect">
             <a:avLst/>
@@ -60024,14 +59946,14 @@
       </p:sp>
       <p:sp>
         <p:nvSpPr>
-          <p:cNvPr id="19" name="TextBox 18"/>
+          <p:cNvPr id="17" name="TextBox 16"/>
           <p:cNvSpPr txBox="1"/>
           <p:nvPr/>
         </p:nvSpPr>
         <p:spPr>
           <a:xfrm>
-            <a:off x="822960" y="4730496"/>
-            <a:ext cx="5944038" cy="728472"/>
+            <a:off x="822960" y="4611624"/>
+            <a:ext cx="5944038" cy="762000"/>
           </a:xfrm>
           <a:prstGeom prst="rect">
             <a:avLst/>
@@ -60050,7 +59972,7 @@
               </a:lnSpc>
             </a:pPr>
             <a:r>
-              <a:rPr sz="1900" i="0" b="1">
+              <a:rPr sz="2000" i="0" b="1">
                 <a:solidFill>
                   <a:srgbClr val="1E293B"/>
                 </a:solidFill>
@@ -60059,7 +59981,7 @@
               <a:t>Course:</a:t>
             </a:r>
             <a:r>
-              <a:rPr sz="1900" i="0" b="0">
+              <a:rPr sz="2000" i="0" b="0">
                 <a:solidFill>
                   <a:srgbClr val="1E293B"/>
                 </a:solidFill>
@@ -60072,14 +59994,14 @@
       </p:sp>
       <p:sp>
         <p:nvSpPr>
-          <p:cNvPr id="20" name="Rectangle 19"/>
+          <p:cNvPr id="18" name="Rectangle 17"/>
           <p:cNvSpPr/>
           <p:nvPr/>
         </p:nvSpPr>
         <p:spPr>
           <a:xfrm>
-            <a:off x="502920" y="5604002"/>
-            <a:ext cx="101346" cy="101346"/>
+            <a:off x="502920" y="5531104"/>
+            <a:ext cx="106680" cy="106680"/>
           </a:xfrm>
           <a:prstGeom prst="rect">
             <a:avLst/>
@@ -60116,14 +60038,14 @@
       </p:sp>
       <p:sp>
         <p:nvSpPr>
-          <p:cNvPr id="21" name="TextBox 20"/>
+          <p:cNvPr id="19" name="TextBox 18"/>
           <p:cNvSpPr txBox="1"/>
           <p:nvPr/>
         </p:nvSpPr>
         <p:spPr>
           <a:xfrm>
-            <a:off x="822960" y="5512308"/>
-            <a:ext cx="5944038" cy="728472"/>
+            <a:off x="822960" y="5434584"/>
+            <a:ext cx="5944038" cy="762000"/>
           </a:xfrm>
           <a:prstGeom prst="rect">
             <a:avLst/>
@@ -60142,7 +60064,7 @@
               </a:lnSpc>
             </a:pPr>
             <a:r>
-              <a:rPr sz="1900" i="0" b="1">
+              <a:rPr sz="2000" i="0" b="1">
                 <a:solidFill>
                   <a:srgbClr val="1E293B"/>
                 </a:solidFill>
@@ -60151,7 +60073,7 @@
               <a:t>Loops:</a:t>
             </a:r>
             <a:r>
-              <a:rPr sz="1900" i="0" b="0">
+              <a:rPr sz="2000" i="0" b="0">
                 <a:solidFill>
                   <a:srgbClr val="1E293B"/>
                 </a:solidFill>
@@ -60164,7 +60086,7 @@
       </p:sp>
       <p:sp>
         <p:nvSpPr>
-          <p:cNvPr id="22" name="Rectangle 21"/>
+          <p:cNvPr id="20" name="Rectangle 19"/>
           <p:cNvSpPr/>
           <p:nvPr/>
         </p:nvSpPr>
@@ -60210,7 +60132,7 @@
       </p:sp>
       <p:sp>
         <p:nvSpPr>
-          <p:cNvPr id="23" name="Rectangle 22"/>
+          <p:cNvPr id="21" name="Rectangle 20"/>
           <p:cNvSpPr/>
           <p:nvPr/>
         </p:nvSpPr>
@@ -60254,7 +60176,7 @@
       </p:sp>
       <p:sp>
         <p:nvSpPr>
-          <p:cNvPr id="24" name="TextBox 23"/>
+          <p:cNvPr id="22" name="TextBox 21"/>
           <p:cNvSpPr txBox="1"/>
           <p:nvPr/>
         </p:nvSpPr>
@@ -60293,7 +60215,7 @@
       </p:sp>
       <p:sp>
         <p:nvSpPr>
-          <p:cNvPr id="25" name="TextBox 24"/>
+          <p:cNvPr id="23" name="TextBox 22"/>
           <p:cNvSpPr txBox="1"/>
           <p:nvPr/>
         </p:nvSpPr>

--- a/ai-engineering/06-eval/slides/eval-engineering.pptx
+++ b/ai-engineering/06-eval/slides/eval-engineering.pptx
@@ -14585,7 +14585,7 @@
       </p:sp>
       <p:pic>
         <p:nvPicPr>
-          <p:cNvPr id="14" name="Picture 13" descr="li-ai-agents-in-depth-fig7-4-404904761524884011.png"/>
+          <p:cNvPr id="14" name="Picture 13" descr="li-ai-agents-in-depth-fig7-4-321716135214440208.png"/>
           <p:cNvPicPr>
             <a:picLocks noChangeAspect="1"/>
           </p:cNvPicPr>
@@ -24018,7 +24018,7 @@
       </p:sp>
       <p:pic>
         <p:nvPicPr>
-          <p:cNvPr id="14" name="Picture 13" descr="li-ai-agents-in-depth-fig7-6-3086927992971478313-7016280338278890230.jpg"/>
+          <p:cNvPr id="14" name="Picture 13" descr="li-ai-agents-in-depth-fig7-6-9045806965009499208-3614337059706064301.jpg"/>
           <p:cNvPicPr>
             <a:picLocks noChangeAspect="1"/>
           </p:cNvPicPr>
@@ -27519,7 +27519,7 @@
       </p:sp>
       <p:pic>
         <p:nvPicPr>
-          <p:cNvPr id="14" name="Picture 13" descr="deeplearning-ai-evaluating-ai-agents-lab3-router-skill-eval-4542069284600904162.jpg"/>
+          <p:cNvPr id="14" name="Picture 13" descr="deeplearning-ai-evaluating-ai-agents-lab3-router-skill-eval-1284347439966023890.jpg"/>
           <p:cNvPicPr>
             <a:picLocks noChangeAspect="1"/>
           </p:cNvPicPr>
@@ -31235,7 +31235,7 @@
       </p:sp>
       <p:pic>
         <p:nvPicPr>
-          <p:cNvPr id="14" name="Picture 13" descr="deeplearning-ai-evaluating-ai-agents-lab4-convergence-experiment-3347250216775804537.jpg"/>
+          <p:cNvPr id="14" name="Picture 13" descr="deeplearning-ai-evaluating-ai-agents-lab4-convergence-experiment-7785901396071594384.jpg"/>
           <p:cNvPicPr>
             <a:picLocks noChangeAspect="1"/>
           </p:cNvPicPr>
@@ -43148,7 +43148,7 @@
       </p:sp>
       <p:pic>
         <p:nvPicPr>
-          <p:cNvPr id="14" name="Picture 13" descr="deeplearning-ai-evaluating-ai-agents-lab5-experiments-4386026617103415200.jpg"/>
+          <p:cNvPr id="14" name="Picture 13" descr="deeplearning-ai-evaluating-ai-agents-lab5-experiments-6491708226243753024.jpg"/>
           <p:cNvPicPr>
             <a:picLocks noChangeAspect="1"/>
           </p:cNvPicPr>
@@ -52880,7 +52880,7 @@
       </p:sp>
       <p:pic>
         <p:nvPicPr>
-          <p:cNvPr id="14" name="Picture 13" descr="course-two-layer-eval-human-llm-calibration-6713432795129806056.jpg"/>
+          <p:cNvPr id="14" name="Picture 13" descr="course-two-layer-eval-human-llm-calibration-4863058176748515426.jpg"/>
           <p:cNvPicPr>
             <a:picLocks noChangeAspect="1"/>
           </p:cNvPicPr>
